--- a/evidence/highlighted_evidence.pptx
+++ b/evidence/highlighted_evidence.pptx
@@ -7472,10 +7472,10 @@
       </p:sp>
       <p:pic>
         <p:nvPicPr>
-          <p:cNvPr id="5" name="Picture 4">
-            <a:extLst>
-              <a:ext uri="{FF2B5EF4-FFF2-40B4-BE49-F238E27FC236}">
-                <a16:creationId xmlns:a16="http://schemas.microsoft.com/office/drawing/2014/main" id="{E4A6E893-667C-6BBD-A001-06F708AC74D6}"/>
+          <p:cNvPr id="7" name="Picture 6">
+            <a:extLst>
+              <a:ext uri="{FF2B5EF4-FFF2-40B4-BE49-F238E27FC236}">
+                <a16:creationId xmlns:a16="http://schemas.microsoft.com/office/drawing/2014/main" id="{C1D8FB04-ED9B-3AFF-48A4-7A2CFC5330F7}"/>
               </a:ext>
             </a:extLst>
           </p:cNvPr>
@@ -7485,15 +7485,21 @@
           <p:nvPr/>
         </p:nvPicPr>
         <p:blipFill>
-          <a:blip r:embed="rId5"/>
+          <a:blip r:embed="rId5">
+            <a:extLst>
+              <a:ext uri="{28A0092B-C50C-407E-A947-70E740481C1C}">
+                <a14:useLocalDpi xmlns:a14="http://schemas.microsoft.com/office/drawing/2010/main" val="0"/>
+              </a:ext>
+            </a:extLst>
+          </a:blip>
           <a:stretch>
             <a:fillRect/>
           </a:stretch>
         </p:blipFill>
         <p:spPr>
           <a:xfrm>
-            <a:off x="1918868" y="2043143"/>
-            <a:ext cx="8229600" cy="4282706"/>
+            <a:off x="2130080" y="2076949"/>
+            <a:ext cx="7931840" cy="4106140"/>
           </a:xfrm>
           <a:prstGeom prst="rect">
             <a:avLst/>
